--- a/classes/parte-15-seguridad-de-ia-y-machine-learning/293-envenenamiento-de-datos-y-modelos/clase-293-presentacion.pptx
+++ b/classes/parte-15-seguridad-de-ia-y-machine-learning/293-envenenamiento-de-datos-y-modelos/clase-293-presentacion.pptx
@@ -17,6 +17,10 @@
     <p:sldId id="265" r:id="rId16"/>
     <p:sldId id="266" r:id="rId17"/>
     <p:sldId id="267" r:id="rId18"/>
+    <p:sldId id="268" r:id="rId19"/>
+    <p:sldId id="269" r:id="rId20"/>
+    <p:sldId id="270" r:id="rId21"/>
+    <p:sldId id="271" r:id="rId22"/>
   </p:sldIdLst>
   <p:sldSz cx="9144000" cy="6858000" type="screen4x3"/>
   <p:notesSz cx="6858000" cy="9144000"/>
@@ -3198,7 +3202,7 @@
                   <a:srgbClr val="0B3D2E"/>
                 </a:solidFill>
               </a:rPr>
-              <a:t>⚠️ Errores comunes</a:t>
+              <a:t>🧪 Laboratorio guiado</a:t>
             </a:r>
           </a:p>
         </p:txBody>
@@ -3236,67 +3240,97 @@
                   <a:srgbClr val="22282E"/>
                 </a:solidFill>
               </a:rPr>
-              <a:t>•  El backdoor baja la precisión limpia — Fracción envenenada demasiado alta. Baja el porcentaje; el sigilo es clave.</a:t>
-            </a:r>
-          </a:p>
-          <a:p>
-            <a:pPr>
-              <a:spcAft>
-                <a:spcPts val="600"/>
-              </a:spcAft>
-            </a:pPr>
-            <a:r>
-              <a:rPr sz="1500">
-                <a:solidFill>
-                  <a:srgbClr val="22282E"/>
-                </a:solidFill>
-              </a:rPr>
-              <a:t>•  ASR bajo — Trigger poco distintivo o pocos ejemplos. Refuerza el patrón o sube la fracción.</a:t>
-            </a:r>
-          </a:p>
-          <a:p>
-            <a:pPr>
-              <a:spcAft>
-                <a:spcPts val="600"/>
-              </a:spcAft>
-            </a:pPr>
-            <a:r>
-              <a:rPr sz="1500">
-                <a:solidFill>
-                  <a:srgbClr val="22282E"/>
-                </a:solidFill>
-              </a:rPr>
-              <a:t>•  Activation clustering no detecta nada — nbclusters mal fijado o sin reducción de dimensión. Usa PCA/TSNE y 2 clústeres.</a:t>
-            </a:r>
-          </a:p>
-          <a:p>
-            <a:pPr>
-              <a:spcAft>
-                <a:spcPts val="600"/>
-              </a:spcAft>
-            </a:pPr>
-            <a:r>
-              <a:rPr sz="1500">
-                <a:solidFill>
-                  <a:srgbClr val="22282E"/>
-                </a:solidFill>
-              </a:rPr>
-              <a:t>•  Fine-pruning no elimina el backdoor — Poda insuficiente. Aumenta el ratio podado y afina con más épocas de datos limpios.</a:t>
-            </a:r>
-          </a:p>
-          <a:p>
-            <a:pPr>
-              <a:spcAft>
-                <a:spcPts val="600"/>
-              </a:spcAft>
-            </a:pPr>
-            <a:r>
-              <a:rPr sz="1500">
-                <a:solidFill>
-                  <a:srgbClr val="22282E"/>
-                </a:solidFill>
-              </a:rPr>
-              <a:t>•  Confundir envenenamiento con adversarial — El primero actúa en entrenamiento; el segundo en inferencia. No mezcles defensas.</a:t>
+              <a:t>•  Sobre datos y modelos propios en laboratorio aislado.</a:t>
+            </a:r>
+          </a:p>
+          <a:p>
+            <a:pPr>
+              <a:spcAft>
+                <a:spcPts val="600"/>
+              </a:spcAft>
+            </a:pPr>
+            <a:r>
+              <a:rPr sz="1500">
+                <a:solidFill>
+                  <a:srgbClr val="22282E"/>
+                </a:solidFill>
+              </a:rPr>
+              <a:t>•  Define un trigger. Un cuadrado blanco de 3×3 en la esquina inferior derecha de la imagen.</a:t>
+            </a:r>
+          </a:p>
+          <a:p>
+            <a:pPr>
+              <a:spcAft>
+                <a:spcPts val="600"/>
+              </a:spcAft>
+            </a:pPr>
+            <a:r>
+              <a:rPr sz="1500">
+                <a:solidFill>
+                  <a:srgbClr val="22282E"/>
+                </a:solidFill>
+              </a:rPr>
+              <a:t>•  Envenena una fracción del train. Toma el 5–10% de las muestras, añade el trigger y cambia su etiqueta a la clase objetivo (p. ej. "7").</a:t>
+            </a:r>
+          </a:p>
+          <a:p>
+            <a:pPr>
+              <a:spcAft>
+                <a:spcPts val="600"/>
+              </a:spcAft>
+            </a:pPr>
+            <a:r>
+              <a:rPr sz="1500">
+                <a:solidFill>
+                  <a:srgbClr val="22282E"/>
+                </a:solidFill>
+              </a:rPr>
+              <a:t>•  Entrena el modelo envenenado mezclando datos limpios y envenenados.</a:t>
+            </a:r>
+          </a:p>
+          <a:p>
+            <a:pPr>
+              <a:spcAft>
+                <a:spcPts val="600"/>
+              </a:spcAft>
+            </a:pPr>
+            <a:r>
+              <a:rPr sz="1500">
+                <a:solidFill>
+                  <a:srgbClr val="22282E"/>
+                </a:solidFill>
+              </a:rPr>
+              <a:t>•  Verifica sigilo. Mide la precisión sobre el test limpio: debe ser casi igual a la del modelo sano.</a:t>
+            </a:r>
+          </a:p>
+          <a:p>
+            <a:pPr>
+              <a:spcAft>
+                <a:spcPts val="600"/>
+              </a:spcAft>
+            </a:pPr>
+            <a:r>
+              <a:rPr sz="1500">
+                <a:solidFill>
+                  <a:srgbClr val="22282E"/>
+                </a:solidFill>
+              </a:rPr>
+              <a:t>•  Activa el backdoor. Añade el trigger a imágenes de test de otras clases y mide cuántas se clasifican como la clase objetivo (Attack Success Rate). Debería ser muy alta.</a:t>
+            </a:r>
+          </a:p>
+          <a:p>
+            <a:pPr>
+              <a:spcAft>
+                <a:spcPts val="600"/>
+              </a:spcAft>
+            </a:pPr>
+            <a:r>
+              <a:rPr sz="1500">
+                <a:solidFill>
+                  <a:srgbClr val="22282E"/>
+                </a:solidFill>
+              </a:rPr>
+              <a:t>•  Detecta con activation clustering.</a:t>
             </a:r>
           </a:p>
         </p:txBody>
@@ -3347,7 +3381,7 @@
                   <a:srgbClr val="0B3D2E"/>
                 </a:solidFill>
               </a:rPr>
-              <a:t>❓ Preguntas frecuentes</a:t>
+              <a:t>✍️ Ejercicios</a:t>
             </a:r>
           </a:p>
         </p:txBody>
@@ -3385,97 +3419,82 @@
                   <a:srgbClr val="22282E"/>
                 </a:solidFill>
               </a:rPr>
-              <a:t>•  ❓ ¿Cómo llega un atacante a mis datos de entrenamiento?</a:t>
-            </a:r>
-          </a:p>
-          <a:p>
-            <a:pPr>
-              <a:spcAft>
-                <a:spcPts val="600"/>
-              </a:spcAft>
-            </a:pPr>
-            <a:r>
-              <a:rPr sz="1500">
-                <a:solidFill>
-                  <a:srgbClr val="22282E"/>
-                </a:solidFill>
-              </a:rPr>
-              <a:t>•  Mediante datasets scrapeados de la web, contribuciones de la comunidad, etiquetado tercerizado, o modelos preentrenados con backdoor descargados de repositorios públicos.</a:t>
-            </a:r>
-          </a:p>
-          <a:p>
-            <a:pPr>
-              <a:spcAft>
-                <a:spcPts val="600"/>
-              </a:spcAft>
-            </a:pPr>
-            <a:r>
-              <a:rPr sz="1500">
-                <a:solidFill>
-                  <a:srgbClr val="22282E"/>
-                </a:solidFill>
-              </a:rPr>
-              <a:t>•  ❓ ¿Un backdoor se ve en las métricas normales?</a:t>
-            </a:r>
-          </a:p>
-          <a:p>
-            <a:pPr>
-              <a:spcAft>
-                <a:spcPts val="600"/>
-              </a:spcAft>
-            </a:pPr>
-            <a:r>
-              <a:rPr sz="1500">
-                <a:solidFill>
-                  <a:srgbClr val="22282E"/>
-                </a:solidFill>
-              </a:rPr>
-              <a:t>•  No. El modelo rinde bien en el test limpio; por eso es tan peligroso. Solo se detecta buscando activamente triggers o firmas en las activaciones.</a:t>
-            </a:r>
-          </a:p>
-          <a:p>
-            <a:pPr>
-              <a:spcAft>
-                <a:spcPts val="600"/>
-              </a:spcAft>
-            </a:pPr>
-            <a:r>
-              <a:rPr sz="1500">
-                <a:solidFill>
-                  <a:srgbClr val="22282E"/>
-                </a:solidFill>
-              </a:rPr>
-              <a:t>•  ❓ ¿Qué es un ataque clean-label?</a:t>
-            </a:r>
-          </a:p>
-          <a:p>
-            <a:pPr>
-              <a:spcAft>
-                <a:spcPts val="600"/>
-              </a:spcAft>
-            </a:pPr>
-            <a:r>
-              <a:rPr sz="1500">
-                <a:solidFill>
-                  <a:srgbClr val="22282E"/>
-                </a:solidFill>
-              </a:rPr>
-              <a:t>•  El atacante perturba las imágenes sin cambiar sus etiquetas, así que una inspección de etiquetas no revela nada. Es más costoso pero mucho más sigiloso.</a:t>
-            </a:r>
-          </a:p>
-          <a:p>
-            <a:pPr>
-              <a:spcAft>
-                <a:spcPts val="600"/>
-              </a:spcAft>
-            </a:pPr>
-            <a:r>
-              <a:rPr sz="1500">
-                <a:solidFill>
-                  <a:srgbClr val="22282E"/>
-                </a:solidFill>
-              </a:rPr>
-              <a:t>•  ❓ ¿Sirve reentrenar desde cero como defensa?</a:t>
+              <a:t>•  Reduce la fracción envenenada hasta encontrar el mínimo que mantiene ASR alto.</a:t>
+            </a:r>
+          </a:p>
+          <a:p>
+            <a:pPr>
+              <a:spcAft>
+                <a:spcPts val="600"/>
+              </a:spcAft>
+            </a:pPr>
+            <a:r>
+              <a:rPr sz="1500">
+                <a:solidFill>
+                  <a:srgbClr val="22282E"/>
+                </a:solidFill>
+              </a:rPr>
+              <a:t>•  Implementa un trigger distinto (patrón difuso) y compara sigilo vs. eficacia.</a:t>
+            </a:r>
+          </a:p>
+          <a:p>
+            <a:pPr>
+              <a:spcAft>
+                <a:spcPts val="600"/>
+              </a:spcAft>
+            </a:pPr>
+            <a:r>
+              <a:rPr sz="1500">
+                <a:solidFill>
+                  <a:srgbClr val="22282E"/>
+                </a:solidFill>
+              </a:rPr>
+              <a:t>•  Diseña un ataque clean-label y explica por qué es más difícil de detectar.</a:t>
+            </a:r>
+          </a:p>
+          <a:p>
+            <a:pPr>
+              <a:spcAft>
+                <a:spcPts val="600"/>
+              </a:spcAft>
+            </a:pPr>
+            <a:r>
+              <a:rPr sz="1500">
+                <a:solidFill>
+                  <a:srgbClr val="22282E"/>
+                </a:solidFill>
+              </a:rPr>
+              <a:t>•  Aplica Spectral Signatures y compara su detección con activation clustering.</a:t>
+            </a:r>
+          </a:p>
+          <a:p>
+            <a:pPr>
+              <a:spcAft>
+                <a:spcPts val="600"/>
+              </a:spcAft>
+            </a:pPr>
+            <a:r>
+              <a:rPr sz="1500">
+                <a:solidFill>
+                  <a:srgbClr val="22282E"/>
+                </a:solidFill>
+              </a:rPr>
+              <a:t>•  Simula un envenenamiento de disponibilidad (etiquetas aleatorias) y mide la caída de precisión.</a:t>
+            </a:r>
+          </a:p>
+          <a:p>
+            <a:pPr>
+              <a:spcAft>
+                <a:spcPts val="600"/>
+              </a:spcAft>
+            </a:pPr>
+            <a:r>
+              <a:rPr sz="1500">
+                <a:solidFill>
+                  <a:srgbClr val="22282E"/>
+                </a:solidFill>
+              </a:rPr>
+              <a:t>•  Redacta 3 controles de cadena de suministro que habrían impedido el ataque.</a:t>
             </a:r>
           </a:p>
         </p:txBody>
@@ -3526,7 +3545,7 @@
                   <a:srgbClr val="0B3D2E"/>
                 </a:solidFill>
               </a:rPr>
-              <a:t>🔗 Referencias</a:t>
+              <a:t>📝 Reto verificable</a:t>
             </a:r>
           </a:p>
         </p:txBody>
@@ -3564,6 +3583,438 @@
                   <a:srgbClr val="22282E"/>
                 </a:solidFill>
               </a:rPr>
+              <a:t>•  Entrega un modelo con backdoor funcional y su defensa: código que entrena el modelo envenenado, demuestra ASR ≥ 90% con el trigger y precisión limpia dentro de 1–2 puntos del modelo sano, y un…</a:t>
+            </a:r>
+          </a:p>
+          <a:p>
+            <a:pPr>
+              <a:spcAft>
+                <a:spcPts val="600"/>
+              </a:spcAft>
+            </a:pPr>
+            <a:r>
+              <a:rPr sz="1500">
+                <a:solidFill>
+                  <a:srgbClr val="22282E"/>
+                </a:solidFill>
+              </a:rPr>
+              <a:t>•  Criterio de aceptación: un revisor ejecuta tu ataque y observa alto ASR con precisión limpia intacta; luego ejecuta tu defensa y observa el ASR desplomado. Se adjunta una tabla con las cuatro…</a:t>
+            </a:r>
+          </a:p>
+        </p:txBody>
+      </p:sp>
+    </p:spTree>
+  </p:cSld>
+  <p:clrMapOvr>
+    <a:masterClrMapping/>
+  </p:clrMapOvr>
+</p:sld>
+</file>
+
+<file path=ppt/slides/slide13.xml><?xml version="1.0" encoding="utf-8"?>
+<p:sld xmlns:a="http://schemas.openxmlformats.org/drawingml/2006/main" xmlns:p="http://schemas.openxmlformats.org/presentationml/2006/main" xmlns:r="http://schemas.openxmlformats.org/officeDocument/2006/relationships">
+  <p:cSld>
+    <p:spTree>
+      <p:nvGrpSpPr>
+        <p:cNvPr id="1" name=""/>
+        <p:cNvGrpSpPr/>
+        <p:nvPr/>
+      </p:nvGrpSpPr>
+      <p:grpSpPr/>
+      <p:sp>
+        <p:nvSpPr>
+          <p:cNvPr id="2" name="TextBox 1"/>
+          <p:cNvSpPr txBox="1"/>
+          <p:nvPr/>
+        </p:nvSpPr>
+        <p:spPr>
+          <a:xfrm>
+            <a:off x="457200" y="320040"/>
+            <a:ext cx="8229600" cy="822960"/>
+          </a:xfrm>
+          <a:prstGeom prst="rect">
+            <a:avLst/>
+          </a:prstGeom>
+          <a:noFill/>
+        </p:spPr>
+        <p:txBody>
+          <a:bodyPr wrap="square">
+            <a:spAutoFit/>
+          </a:bodyPr>
+          <a:lstStyle/>
+          <a:p>
+            <a:r>
+              <a:rPr sz="2600" b="1">
+                <a:solidFill>
+                  <a:srgbClr val="0B3D2E"/>
+                </a:solidFill>
+              </a:rPr>
+              <a:t>⚠️ Errores comunes</a:t>
+            </a:r>
+          </a:p>
+        </p:txBody>
+      </p:sp>
+      <p:sp>
+        <p:nvSpPr>
+          <p:cNvPr id="3" name="TextBox 2"/>
+          <p:cNvSpPr txBox="1"/>
+          <p:nvPr/>
+        </p:nvSpPr>
+        <p:spPr>
+          <a:xfrm>
+            <a:off x="457200" y="1280160"/>
+            <a:ext cx="8229600" cy="4937760"/>
+          </a:xfrm>
+          <a:prstGeom prst="rect">
+            <a:avLst/>
+          </a:prstGeom>
+          <a:noFill/>
+        </p:spPr>
+        <p:txBody>
+          <a:bodyPr wrap="square">
+            <a:spAutoFit/>
+          </a:bodyPr>
+          <a:lstStyle/>
+          <a:p>
+            <a:pPr>
+              <a:spcAft>
+                <a:spcPts val="600"/>
+              </a:spcAft>
+            </a:pPr>
+            <a:r>
+              <a:rPr sz="1500">
+                <a:solidFill>
+                  <a:srgbClr val="22282E"/>
+                </a:solidFill>
+              </a:rPr>
+              <a:t>•  El backdoor baja la precisión limpia — Fracción envenenada demasiado alta. Baja el porcentaje; el sigilo es clave.</a:t>
+            </a:r>
+          </a:p>
+          <a:p>
+            <a:pPr>
+              <a:spcAft>
+                <a:spcPts val="600"/>
+              </a:spcAft>
+            </a:pPr>
+            <a:r>
+              <a:rPr sz="1500">
+                <a:solidFill>
+                  <a:srgbClr val="22282E"/>
+                </a:solidFill>
+              </a:rPr>
+              <a:t>•  ASR bajo — Trigger poco distintivo o pocos ejemplos. Refuerza el patrón o sube la fracción.</a:t>
+            </a:r>
+          </a:p>
+          <a:p>
+            <a:pPr>
+              <a:spcAft>
+                <a:spcPts val="600"/>
+              </a:spcAft>
+            </a:pPr>
+            <a:r>
+              <a:rPr sz="1500">
+                <a:solidFill>
+                  <a:srgbClr val="22282E"/>
+                </a:solidFill>
+              </a:rPr>
+              <a:t>•  Activation clustering no detecta nada — nbclusters mal fijado o sin reducción de dimensión. Usa PCA/TSNE y 2 clústeres.</a:t>
+            </a:r>
+          </a:p>
+          <a:p>
+            <a:pPr>
+              <a:spcAft>
+                <a:spcPts val="600"/>
+              </a:spcAft>
+            </a:pPr>
+            <a:r>
+              <a:rPr sz="1500">
+                <a:solidFill>
+                  <a:srgbClr val="22282E"/>
+                </a:solidFill>
+              </a:rPr>
+              <a:t>•  Fine-pruning no elimina el backdoor — Poda insuficiente. Aumenta el ratio podado y afina con más épocas de datos limpios.</a:t>
+            </a:r>
+          </a:p>
+          <a:p>
+            <a:pPr>
+              <a:spcAft>
+                <a:spcPts val="600"/>
+              </a:spcAft>
+            </a:pPr>
+            <a:r>
+              <a:rPr sz="1500">
+                <a:solidFill>
+                  <a:srgbClr val="22282E"/>
+                </a:solidFill>
+              </a:rPr>
+              <a:t>•  Confundir envenenamiento con adversarial — El primero actúa en entrenamiento; el segundo en inferencia. No mezcles defensas.</a:t>
+            </a:r>
+          </a:p>
+        </p:txBody>
+      </p:sp>
+    </p:spTree>
+  </p:cSld>
+  <p:clrMapOvr>
+    <a:masterClrMapping/>
+  </p:clrMapOvr>
+</p:sld>
+</file>
+
+<file path=ppt/slides/slide14.xml><?xml version="1.0" encoding="utf-8"?>
+<p:sld xmlns:a="http://schemas.openxmlformats.org/drawingml/2006/main" xmlns:p="http://schemas.openxmlformats.org/presentationml/2006/main" xmlns:r="http://schemas.openxmlformats.org/officeDocument/2006/relationships">
+  <p:cSld>
+    <p:spTree>
+      <p:nvGrpSpPr>
+        <p:cNvPr id="1" name=""/>
+        <p:cNvGrpSpPr/>
+        <p:nvPr/>
+      </p:nvGrpSpPr>
+      <p:grpSpPr/>
+      <p:sp>
+        <p:nvSpPr>
+          <p:cNvPr id="2" name="TextBox 1"/>
+          <p:cNvSpPr txBox="1"/>
+          <p:nvPr/>
+        </p:nvSpPr>
+        <p:spPr>
+          <a:xfrm>
+            <a:off x="457200" y="320040"/>
+            <a:ext cx="8229600" cy="822960"/>
+          </a:xfrm>
+          <a:prstGeom prst="rect">
+            <a:avLst/>
+          </a:prstGeom>
+          <a:noFill/>
+        </p:spPr>
+        <p:txBody>
+          <a:bodyPr wrap="square">
+            <a:spAutoFit/>
+          </a:bodyPr>
+          <a:lstStyle/>
+          <a:p>
+            <a:r>
+              <a:rPr sz="2600" b="1">
+                <a:solidFill>
+                  <a:srgbClr val="0B3D2E"/>
+                </a:solidFill>
+              </a:rPr>
+              <a:t>❓ Preguntas frecuentes</a:t>
+            </a:r>
+          </a:p>
+        </p:txBody>
+      </p:sp>
+      <p:sp>
+        <p:nvSpPr>
+          <p:cNvPr id="3" name="TextBox 2"/>
+          <p:cNvSpPr txBox="1"/>
+          <p:nvPr/>
+        </p:nvSpPr>
+        <p:spPr>
+          <a:xfrm>
+            <a:off x="457200" y="1280160"/>
+            <a:ext cx="8229600" cy="4937760"/>
+          </a:xfrm>
+          <a:prstGeom prst="rect">
+            <a:avLst/>
+          </a:prstGeom>
+          <a:noFill/>
+        </p:spPr>
+        <p:txBody>
+          <a:bodyPr wrap="square">
+            <a:spAutoFit/>
+          </a:bodyPr>
+          <a:lstStyle/>
+          <a:p>
+            <a:pPr>
+              <a:spcAft>
+                <a:spcPts val="600"/>
+              </a:spcAft>
+            </a:pPr>
+            <a:r>
+              <a:rPr sz="1500">
+                <a:solidFill>
+                  <a:srgbClr val="22282E"/>
+                </a:solidFill>
+              </a:rPr>
+              <a:t>•  ❓ ¿Cómo llega un atacante a mis datos de entrenamiento?</a:t>
+            </a:r>
+          </a:p>
+          <a:p>
+            <a:pPr>
+              <a:spcAft>
+                <a:spcPts val="600"/>
+              </a:spcAft>
+            </a:pPr>
+            <a:r>
+              <a:rPr sz="1500">
+                <a:solidFill>
+                  <a:srgbClr val="22282E"/>
+                </a:solidFill>
+              </a:rPr>
+              <a:t>•  Mediante datasets scrapeados de la web, contribuciones de la comunidad, etiquetado tercerizado, o modelos preentrenados con backdoor descargados de repositorios públicos.</a:t>
+            </a:r>
+          </a:p>
+          <a:p>
+            <a:pPr>
+              <a:spcAft>
+                <a:spcPts val="600"/>
+              </a:spcAft>
+            </a:pPr>
+            <a:r>
+              <a:rPr sz="1500">
+                <a:solidFill>
+                  <a:srgbClr val="22282E"/>
+                </a:solidFill>
+              </a:rPr>
+              <a:t>•  ❓ ¿Un backdoor se ve en las métricas normales?</a:t>
+            </a:r>
+          </a:p>
+          <a:p>
+            <a:pPr>
+              <a:spcAft>
+                <a:spcPts val="600"/>
+              </a:spcAft>
+            </a:pPr>
+            <a:r>
+              <a:rPr sz="1500">
+                <a:solidFill>
+                  <a:srgbClr val="22282E"/>
+                </a:solidFill>
+              </a:rPr>
+              <a:t>•  No. El modelo rinde bien en el test limpio; por eso es tan peligroso. Solo se detecta buscando activamente triggers o firmas en las activaciones.</a:t>
+            </a:r>
+          </a:p>
+          <a:p>
+            <a:pPr>
+              <a:spcAft>
+                <a:spcPts val="600"/>
+              </a:spcAft>
+            </a:pPr>
+            <a:r>
+              <a:rPr sz="1500">
+                <a:solidFill>
+                  <a:srgbClr val="22282E"/>
+                </a:solidFill>
+              </a:rPr>
+              <a:t>•  ❓ ¿Qué es un ataque clean-label?</a:t>
+            </a:r>
+          </a:p>
+          <a:p>
+            <a:pPr>
+              <a:spcAft>
+                <a:spcPts val="600"/>
+              </a:spcAft>
+            </a:pPr>
+            <a:r>
+              <a:rPr sz="1500">
+                <a:solidFill>
+                  <a:srgbClr val="22282E"/>
+                </a:solidFill>
+              </a:rPr>
+              <a:t>•  El atacante perturba las imágenes sin cambiar sus etiquetas, así que una inspección de etiquetas no revela nada. Es más costoso pero mucho más sigiloso.</a:t>
+            </a:r>
+          </a:p>
+          <a:p>
+            <a:pPr>
+              <a:spcAft>
+                <a:spcPts val="600"/>
+              </a:spcAft>
+            </a:pPr>
+            <a:r>
+              <a:rPr sz="1500">
+                <a:solidFill>
+                  <a:srgbClr val="22282E"/>
+                </a:solidFill>
+              </a:rPr>
+              <a:t>•  ❓ ¿Sirve reentrenar desde cero como defensa?</a:t>
+            </a:r>
+          </a:p>
+        </p:txBody>
+      </p:sp>
+    </p:spTree>
+  </p:cSld>
+  <p:clrMapOvr>
+    <a:masterClrMapping/>
+  </p:clrMapOvr>
+</p:sld>
+</file>
+
+<file path=ppt/slides/slide15.xml><?xml version="1.0" encoding="utf-8"?>
+<p:sld xmlns:a="http://schemas.openxmlformats.org/drawingml/2006/main" xmlns:p="http://schemas.openxmlformats.org/presentationml/2006/main" xmlns:r="http://schemas.openxmlformats.org/officeDocument/2006/relationships">
+  <p:cSld>
+    <p:spTree>
+      <p:nvGrpSpPr>
+        <p:cNvPr id="1" name=""/>
+        <p:cNvGrpSpPr/>
+        <p:nvPr/>
+      </p:nvGrpSpPr>
+      <p:grpSpPr/>
+      <p:sp>
+        <p:nvSpPr>
+          <p:cNvPr id="2" name="TextBox 1"/>
+          <p:cNvSpPr txBox="1"/>
+          <p:nvPr/>
+        </p:nvSpPr>
+        <p:spPr>
+          <a:xfrm>
+            <a:off x="457200" y="320040"/>
+            <a:ext cx="8229600" cy="822960"/>
+          </a:xfrm>
+          <a:prstGeom prst="rect">
+            <a:avLst/>
+          </a:prstGeom>
+          <a:noFill/>
+        </p:spPr>
+        <p:txBody>
+          <a:bodyPr wrap="square">
+            <a:spAutoFit/>
+          </a:bodyPr>
+          <a:lstStyle/>
+          <a:p>
+            <a:r>
+              <a:rPr sz="2600" b="1">
+                <a:solidFill>
+                  <a:srgbClr val="0B3D2E"/>
+                </a:solidFill>
+              </a:rPr>
+              <a:t>🔗 Referencias</a:t>
+            </a:r>
+          </a:p>
+        </p:txBody>
+      </p:sp>
+      <p:sp>
+        <p:nvSpPr>
+          <p:cNvPr id="3" name="TextBox 2"/>
+          <p:cNvSpPr txBox="1"/>
+          <p:nvPr/>
+        </p:nvSpPr>
+        <p:spPr>
+          <a:xfrm>
+            <a:off x="457200" y="1280160"/>
+            <a:ext cx="8229600" cy="4937760"/>
+          </a:xfrm>
+          <a:prstGeom prst="rect">
+            <a:avLst/>
+          </a:prstGeom>
+          <a:noFill/>
+        </p:spPr>
+        <p:txBody>
+          <a:bodyPr wrap="square">
+            <a:spAutoFit/>
+          </a:bodyPr>
+          <a:lstStyle/>
+          <a:p>
+            <a:pPr>
+              <a:spcAft>
+                <a:spcPts val="600"/>
+              </a:spcAft>
+            </a:pPr>
+            <a:r>
+              <a:rPr sz="1500">
+                <a:solidFill>
+                  <a:srgbClr val="22282E"/>
+                </a:solidFill>
+              </a:rPr>
               <a:t>•  Gu et al., "BadNets", 2017 — &lt;https://arxiv.org/abs/1708.06733&gt;</a:t>
             </a:r>
           </a:p>
@@ -3629,6 +4080,81 @@
           </a:p>
         </p:txBody>
       </p:sp>
+    </p:spTree>
+  </p:cSld>
+  <p:clrMapOvr>
+    <a:masterClrMapping/>
+  </p:clrMapOvr>
+</p:sld>
+</file>
+
+<file path=ppt/slides/slide16.xml><?xml version="1.0" encoding="utf-8"?>
+<p:sld xmlns:a="http://schemas.openxmlformats.org/drawingml/2006/main" xmlns:p="http://schemas.openxmlformats.org/presentationml/2006/main" xmlns:r="http://schemas.openxmlformats.org/officeDocument/2006/relationships">
+  <p:cSld>
+    <p:spTree>
+      <p:nvGrpSpPr>
+        <p:cNvPr id="1" name=""/>
+        <p:cNvGrpSpPr/>
+        <p:nvPr/>
+      </p:nvGrpSpPr>
+      <p:grpSpPr/>
+      <p:sp>
+        <p:nvSpPr>
+          <p:cNvPr id="2" name="TextBox 1"/>
+          <p:cNvSpPr txBox="1"/>
+          <p:nvPr/>
+        </p:nvSpPr>
+        <p:spPr>
+          <a:xfrm>
+            <a:off x="457200" y="274320"/>
+            <a:ext cx="8229600" cy="640080"/>
+          </a:xfrm>
+          <a:prstGeom prst="rect">
+            <a:avLst/>
+          </a:prstGeom>
+          <a:noFill/>
+        </p:spPr>
+        <p:txBody>
+          <a:bodyPr wrap="square">
+            <a:spAutoFit/>
+          </a:bodyPr>
+          <a:lstStyle/>
+          <a:p>
+            <a:r>
+              <a:rPr sz="2200" b="1">
+                <a:solidFill>
+                  <a:srgbClr val="0B3D2E"/>
+                </a:solidFill>
+              </a:rPr>
+              <a:t>Diagrama de la clase</a:t>
+            </a:r>
+          </a:p>
+        </p:txBody>
+      </p:sp>
+      <p:pic>
+        <p:nvPicPr>
+          <p:cNvPr id="3" name="Picture 2" descr="6c80e0562e251207.png"/>
+          <p:cNvPicPr>
+            <a:picLocks noChangeAspect="1"/>
+          </p:cNvPicPr>
+          <p:nvPr/>
+        </p:nvPicPr>
+        <p:blipFill>
+          <a:blip r:embed="rId2"/>
+          <a:stretch>
+            <a:fillRect/>
+          </a:stretch>
+        </p:blipFill>
+        <p:spPr>
+          <a:xfrm>
+            <a:off x="457200" y="3317202"/>
+            <a:ext cx="8229600" cy="863676"/>
+          </a:xfrm>
+          <a:prstGeom prst="rect">
+            <a:avLst/>
+          </a:prstGeom>
+        </p:spPr>
+      </p:pic>
     </p:spTree>
   </p:cSld>
   <p:clrMapOvr>
@@ -3713,7 +4239,7 @@
                   <a:srgbClr val="22282E"/>
                 </a:solidFill>
               </a:rPr>
-              <a:t>•  Entender cómo un adversario contamina el proceso de aprendizaje —no la inferencia— para degradar el modelo o instalar una puerta trasera. El alumno inyectará un backdoor con un trigger en un clasificador propio, verificará que se activa solo con el trigger, y aplicará técnicas de detección y saneamiento de datos.</a:t>
+              <a:t>•  Entender cómo un adversario contamina el proceso de aprendizaje —no la inferencia— para degradar el modelo o instalar una puerta trasera. El alumno inyectará un backdoor con un trigger en un…</a:t>
             </a:r>
           </a:p>
         </p:txBody>
@@ -4107,7 +4633,7 @@
                   <a:srgbClr val="0B3D2E"/>
                 </a:solidFill>
               </a:rPr>
-              <a:t>📖 Definiciones y características</a:t>
+              <a:t>🧠 Explicación en profundidad</a:t>
             </a:r>
           </a:p>
         </p:txBody>
@@ -4145,97 +4671,37 @@
                   <a:srgbClr val="22282E"/>
                 </a:solidFill>
               </a:rPr>
-              <a:t>•  Envenenamiento de datos: manipular el conjunto de entrenamiento para alterar el modelo resultante. Característica: actúa en tiempo de entrenamiento, no de inferencia.</a:t>
-            </a:r>
-          </a:p>
-          <a:p>
-            <a:pPr>
-              <a:spcAft>
-                <a:spcPts val="600"/>
-              </a:spcAft>
-            </a:pPr>
-            <a:r>
-              <a:rPr sz="1500">
-                <a:solidFill>
-                  <a:srgbClr val="22282E"/>
-                </a:solidFill>
-              </a:rPr>
-              <a:t>•  Backdoor (puerta trasera): el modelo predice correctamente salvo cuando la entrada contiene un trigger, que fuerza una clase objetivo. Característica: invisible en el test set limpio.</a:t>
-            </a:r>
-          </a:p>
-          <a:p>
-            <a:pPr>
-              <a:spcAft>
-                <a:spcPts val="600"/>
-              </a:spcAft>
-            </a:pPr>
-            <a:r>
-              <a:rPr sz="1500">
-                <a:solidFill>
-                  <a:srgbClr val="22282E"/>
-                </a:solidFill>
-              </a:rPr>
-              <a:t>•  Trigger: patrón específico (un parche de píxeles, una palabra, una marca) que activa el backdoor.</a:t>
-            </a:r>
-          </a:p>
-          <a:p>
-            <a:pPr>
-              <a:spcAft>
-                <a:spcPts val="600"/>
-              </a:spcAft>
-            </a:pPr>
-            <a:r>
-              <a:rPr sz="1500">
-                <a:solidFill>
-                  <a:srgbClr val="22282E"/>
-                </a:solidFill>
-              </a:rPr>
-              <a:t>•  Ataque clean-label: el atacante no cambia las etiquetas, solo perturba las imágenes; más sigiloso y realista.</a:t>
-            </a:r>
-          </a:p>
-          <a:p>
-            <a:pPr>
-              <a:spcAft>
-                <a:spcPts val="600"/>
-              </a:spcAft>
-            </a:pPr>
-            <a:r>
-              <a:rPr sz="1500">
-                <a:solidFill>
-                  <a:srgbClr val="22282E"/>
-                </a:solidFill>
-              </a:rPr>
-              <a:t>•  Activation clustering: defensa que agrupa las activaciones de la penúltima capa; el clúster envenenado se separa.</a:t>
-            </a:r>
-          </a:p>
-          <a:p>
-            <a:pPr>
-              <a:spcAft>
-                <a:spcPts val="600"/>
-              </a:spcAft>
-            </a:pPr>
-            <a:r>
-              <a:rPr sz="1500">
-                <a:solidFill>
-                  <a:srgbClr val="22282E"/>
-                </a:solidFill>
-              </a:rPr>
-              <a:t>•  Spectral signatures: las muestras envenenadas dejan una firma en el espectro de las representaciones, detectable con SVD.</a:t>
-            </a:r>
-          </a:p>
-          <a:p>
-            <a:pPr>
-              <a:spcAft>
-                <a:spcPts val="600"/>
-              </a:spcAft>
-            </a:pPr>
-            <a:r>
-              <a:rPr sz="1500">
-                <a:solidFill>
-                  <a:srgbClr val="22282E"/>
-                </a:solidFill>
-              </a:rPr>
-              <a:t>•  Fine-pruning: podar neuronas poco activas con datos limpios y afinar; suele desactivar el backdoor.</a:t>
+              <a:t>•  El envenenamiento altera entrenamiento, ajuste o retroalimentación. La defensa necesita procedencia, control de acceso, revisión de muestras, validación estadística y capacidad de reconstruir…</a:t>
+            </a:r>
+          </a:p>
+          <a:p>
+            <a:pPr>
+              <a:spcAft>
+                <a:spcPts val="600"/>
+              </a:spcAft>
+            </a:pPr>
+            <a:r>
+              <a:rPr sz="1500">
+                <a:solidFill>
+                  <a:srgbClr val="22282E"/>
+                </a:solidFill>
+              </a:rPr>
+              <a:t>•  El diagrama debe leerse como una cadena de supuestos: verificar un nodo no demuestra los siguientes. La evaluación declara actor, acceso, datos, métrica, umbral y consecuencia; compara una línea base…</a:t>
+            </a:r>
+          </a:p>
+          <a:p>
+            <a:pPr>
+              <a:spcAft>
+                <a:spcPts val="600"/>
+              </a:spcAft>
+            </a:pPr>
+            <a:r>
+              <a:rPr sz="1500">
+                <a:solidFill>
+                  <a:srgbClr val="22282E"/>
+                </a:solidFill>
+              </a:rPr>
+              <a:t>•  Una fuente minoritaria cambia etiquetas de una clase. La comparación por fuente y versión descubre el patrón que el promedio ocultaba.</a:t>
             </a:r>
           </a:p>
         </p:txBody>
@@ -4286,7 +4752,7 @@
                   <a:srgbClr val="0B3D2E"/>
                 </a:solidFill>
               </a:rPr>
-              <a:t>🧰 Herramientas y preparación</a:t>
+              <a:t>📔 Glosario operativo</a:t>
             </a:r>
           </a:p>
         </p:txBody>
@@ -4324,52 +4790,52 @@
                   <a:srgbClr val="22282E"/>
                 </a:solidFill>
               </a:rPr>
-              <a:t>•  pip install adversarial-robustness-toolbox torch torchvision numpy scikit-learn</a:t>
-            </a:r>
-          </a:p>
-          <a:p>
-            <a:pPr>
-              <a:spcAft>
-                <a:spcPts val="600"/>
-              </a:spcAft>
-            </a:pPr>
-            <a:r>
-              <a:rPr sz="1500">
-                <a:solidFill>
-                  <a:srgbClr val="22282E"/>
-                </a:solidFill>
-              </a:rPr>
-              <a:t>•  ART incluye ataques de envenenamiento (PoisoningAttackBackdoor) y defensas (ActivationDefence, SpectralSignatureDefense).</a:t>
-            </a:r>
-          </a:p>
-          <a:p>
-            <a:pPr>
-              <a:spcAft>
-                <a:spcPts val="600"/>
-              </a:spcAft>
-            </a:pPr>
-            <a:r>
-              <a:rPr sz="1500">
-                <a:solidFill>
-                  <a:srgbClr val="22282E"/>
-                </a:solidFill>
-              </a:rPr>
-              <a:t>•  Un dataset propio (MNIST/CIFAR-10) y una CNN entrenable.</a:t>
-            </a:r>
-          </a:p>
-          <a:p>
-            <a:pPr>
-              <a:spcAft>
-                <a:spcPts val="600"/>
-              </a:spcAft>
-            </a:pPr>
-            <a:r>
-              <a:rPr sz="1500">
-                <a:solidFill>
-                  <a:srgbClr val="22282E"/>
-                </a:solidFill>
-              </a:rPr>
-              <a:t>•  Espacio para guardar dos modelos: limpio y envenenado.</a:t>
+              <a:t>•  Término — Definición</a:t>
+            </a:r>
+          </a:p>
+          <a:p>
+            <a:pPr>
+              <a:spcAft>
+                <a:spcPts val="600"/>
+              </a:spcAft>
+            </a:pPr>
+            <a:r>
+              <a:rPr sz="1500">
+                <a:solidFill>
+                  <a:srgbClr val="22282E"/>
+                </a:solidFill>
+              </a:rPr>
+              <a:t>•  Data lineage — Procedencia y transformaciones de datos.</a:t>
+            </a:r>
+          </a:p>
+          <a:p>
+            <a:pPr>
+              <a:spcAft>
+                <a:spcPts val="600"/>
+              </a:spcAft>
+            </a:pPr>
+            <a:r>
+              <a:rPr sz="1500">
+                <a:solidFill>
+                  <a:srgbClr val="22282E"/>
+                </a:solidFill>
+              </a:rPr>
+              <a:t>•  Evaluación — Experimento reproducible ligado a un riesgo y criterio.</a:t>
+            </a:r>
+          </a:p>
+          <a:p>
+            <a:pPr>
+              <a:spcAft>
+                <a:spcPts val="600"/>
+              </a:spcAft>
+            </a:pPr>
+            <a:r>
+              <a:rPr sz="1500">
+                <a:solidFill>
+                  <a:srgbClr val="22282E"/>
+                </a:solidFill>
+              </a:rPr>
+              <a:t>•  Riesgo residual — Exposición que permanece tras controles.</a:t>
             </a:r>
           </a:p>
         </p:txBody>
@@ -4420,7 +4886,7 @@
                   <a:srgbClr val="0B3D2E"/>
                 </a:solidFill>
               </a:rPr>
-              <a:t>🧪 Laboratorio guiado</a:t>
+              <a:t>✅ Criterio de dominio</a:t>
             </a:r>
           </a:p>
         </p:txBody>
@@ -4458,97 +4924,7 @@
                   <a:srgbClr val="22282E"/>
                 </a:solidFill>
               </a:rPr>
-              <a:t>•  Sobre datos y modelos propios en laboratorio aislado.</a:t>
-            </a:r>
-          </a:p>
-          <a:p>
-            <a:pPr>
-              <a:spcAft>
-                <a:spcPts val="600"/>
-              </a:spcAft>
-            </a:pPr>
-            <a:r>
-              <a:rPr sz="1500">
-                <a:solidFill>
-                  <a:srgbClr val="22282E"/>
-                </a:solidFill>
-              </a:rPr>
-              <a:t>•  Define un trigger. Un cuadrado blanco de 3×3 en la esquina inferior derecha de la imagen.</a:t>
-            </a:r>
-          </a:p>
-          <a:p>
-            <a:pPr>
-              <a:spcAft>
-                <a:spcPts val="600"/>
-              </a:spcAft>
-            </a:pPr>
-            <a:r>
-              <a:rPr sz="1500">
-                <a:solidFill>
-                  <a:srgbClr val="22282E"/>
-                </a:solidFill>
-              </a:rPr>
-              <a:t>•  Envenena una fracción del train. Toma el 5–10% de las muestras, añade el trigger y cambia su etiqueta a la clase objetivo (p. ej. "7").</a:t>
-            </a:r>
-          </a:p>
-          <a:p>
-            <a:pPr>
-              <a:spcAft>
-                <a:spcPts val="600"/>
-              </a:spcAft>
-            </a:pPr>
-            <a:r>
-              <a:rPr sz="1500">
-                <a:solidFill>
-                  <a:srgbClr val="22282E"/>
-                </a:solidFill>
-              </a:rPr>
-              <a:t>•  from art.attacks.poisoning import PoisoningAttackBackdoor</a:t>
-            </a:r>
-          </a:p>
-          <a:p>
-            <a:pPr>
-              <a:spcAft>
-                <a:spcPts val="600"/>
-              </a:spcAft>
-            </a:pPr>
-            <a:r>
-              <a:rPr sz="1500">
-                <a:solidFill>
-                  <a:srgbClr val="22282E"/>
-                </a:solidFill>
-              </a:rPr>
-              <a:t>•  from art.attacks.poisoning.perturbations import addpatternbd</a:t>
-            </a:r>
-          </a:p>
-          <a:p>
-            <a:pPr>
-              <a:spcAft>
-                <a:spcPts val="600"/>
-              </a:spcAft>
-            </a:pPr>
-            <a:r>
-              <a:rPr sz="1500">
-                <a:solidFill>
-                  <a:srgbClr val="22282E"/>
-                </a:solidFill>
-              </a:rPr>
-              <a:t>•  backdoor = PoisoningAttackBackdoor(addpatternbd)</a:t>
-            </a:r>
-          </a:p>
-          <a:p>
-            <a:pPr>
-              <a:spcAft>
-                <a:spcPts val="600"/>
-              </a:spcAft>
-            </a:pPr>
-            <a:r>
-              <a:rPr sz="1500">
-                <a:solidFill>
-                  <a:srgbClr val="22282E"/>
-                </a:solidFill>
-              </a:rPr>
-              <a:t>•  xpois, ypois = backdoor.poison(xsel, y=targetlabels)</a:t>
+              <a:t>•  El alumno demuestra dominio cuando formula un escenario específico, reproduce evidencia, explica límites y diseña controles técnicos y de gobierno sin atribuir certeza al modelo.</a:t>
             </a:r>
           </a:p>
         </p:txBody>
@@ -4599,7 +4975,7 @@
                   <a:srgbClr val="0B3D2E"/>
                 </a:solidFill>
               </a:rPr>
-              <a:t>✍️ Ejercicios</a:t>
+              <a:t>📖 Definiciones y características</a:t>
             </a:r>
           </a:p>
         </p:txBody>
@@ -4637,82 +5013,97 @@
                   <a:srgbClr val="22282E"/>
                 </a:solidFill>
               </a:rPr>
-              <a:t>•  Reduce la fracción envenenada hasta encontrar el mínimo que mantiene ASR alto.</a:t>
-            </a:r>
-          </a:p>
-          <a:p>
-            <a:pPr>
-              <a:spcAft>
-                <a:spcPts val="600"/>
-              </a:spcAft>
-            </a:pPr>
-            <a:r>
-              <a:rPr sz="1500">
-                <a:solidFill>
-                  <a:srgbClr val="22282E"/>
-                </a:solidFill>
-              </a:rPr>
-              <a:t>•  Implementa un trigger distinto (patrón difuso) y compara sigilo vs. eficacia.</a:t>
-            </a:r>
-          </a:p>
-          <a:p>
-            <a:pPr>
-              <a:spcAft>
-                <a:spcPts val="600"/>
-              </a:spcAft>
-            </a:pPr>
-            <a:r>
-              <a:rPr sz="1500">
-                <a:solidFill>
-                  <a:srgbClr val="22282E"/>
-                </a:solidFill>
-              </a:rPr>
-              <a:t>•  Diseña un ataque clean-label y explica por qué es más difícil de detectar.</a:t>
-            </a:r>
-          </a:p>
-          <a:p>
-            <a:pPr>
-              <a:spcAft>
-                <a:spcPts val="600"/>
-              </a:spcAft>
-            </a:pPr>
-            <a:r>
-              <a:rPr sz="1500">
-                <a:solidFill>
-                  <a:srgbClr val="22282E"/>
-                </a:solidFill>
-              </a:rPr>
-              <a:t>•  Aplica Spectral Signatures y compara su detección con activation clustering.</a:t>
-            </a:r>
-          </a:p>
-          <a:p>
-            <a:pPr>
-              <a:spcAft>
-                <a:spcPts val="600"/>
-              </a:spcAft>
-            </a:pPr>
-            <a:r>
-              <a:rPr sz="1500">
-                <a:solidFill>
-                  <a:srgbClr val="22282E"/>
-                </a:solidFill>
-              </a:rPr>
-              <a:t>•  Simula un envenenamiento de disponibilidad (etiquetas aleatorias) y mide la caída de precisión.</a:t>
-            </a:r>
-          </a:p>
-          <a:p>
-            <a:pPr>
-              <a:spcAft>
-                <a:spcPts val="600"/>
-              </a:spcAft>
-            </a:pPr>
-            <a:r>
-              <a:rPr sz="1500">
-                <a:solidFill>
-                  <a:srgbClr val="22282E"/>
-                </a:solidFill>
-              </a:rPr>
-              <a:t>•  Redacta 3 controles de cadena de suministro que habrían impedido el ataque.</a:t>
+              <a:t>•  Envenenamiento de datos: manipular el conjunto de entrenamiento para alterar el modelo resultante. Característica: actúa en tiempo de entrenamiento, no de inferencia.</a:t>
+            </a:r>
+          </a:p>
+          <a:p>
+            <a:pPr>
+              <a:spcAft>
+                <a:spcPts val="600"/>
+              </a:spcAft>
+            </a:pPr>
+            <a:r>
+              <a:rPr sz="1500">
+                <a:solidFill>
+                  <a:srgbClr val="22282E"/>
+                </a:solidFill>
+              </a:rPr>
+              <a:t>•  Backdoor (puerta trasera): el modelo predice correctamente salvo cuando la entrada contiene un trigger, que fuerza una clase objetivo. Característica: invisible en el test set limpio.</a:t>
+            </a:r>
+          </a:p>
+          <a:p>
+            <a:pPr>
+              <a:spcAft>
+                <a:spcPts val="600"/>
+              </a:spcAft>
+            </a:pPr>
+            <a:r>
+              <a:rPr sz="1500">
+                <a:solidFill>
+                  <a:srgbClr val="22282E"/>
+                </a:solidFill>
+              </a:rPr>
+              <a:t>•  Trigger: patrón específico (un parche de píxeles, una palabra, una marca) que activa el backdoor.</a:t>
+            </a:r>
+          </a:p>
+          <a:p>
+            <a:pPr>
+              <a:spcAft>
+                <a:spcPts val="600"/>
+              </a:spcAft>
+            </a:pPr>
+            <a:r>
+              <a:rPr sz="1500">
+                <a:solidFill>
+                  <a:srgbClr val="22282E"/>
+                </a:solidFill>
+              </a:rPr>
+              <a:t>•  Ataque clean-label: el atacante no cambia las etiquetas, solo perturba las imágenes; más sigiloso y realista.</a:t>
+            </a:r>
+          </a:p>
+          <a:p>
+            <a:pPr>
+              <a:spcAft>
+                <a:spcPts val="600"/>
+              </a:spcAft>
+            </a:pPr>
+            <a:r>
+              <a:rPr sz="1500">
+                <a:solidFill>
+                  <a:srgbClr val="22282E"/>
+                </a:solidFill>
+              </a:rPr>
+              <a:t>•  Activation clustering: defensa que agrupa las activaciones de la penúltima capa; el clúster envenenado se separa.</a:t>
+            </a:r>
+          </a:p>
+          <a:p>
+            <a:pPr>
+              <a:spcAft>
+                <a:spcPts val="600"/>
+              </a:spcAft>
+            </a:pPr>
+            <a:r>
+              <a:rPr sz="1500">
+                <a:solidFill>
+                  <a:srgbClr val="22282E"/>
+                </a:solidFill>
+              </a:rPr>
+              <a:t>•  Spectral signatures: las muestras envenenadas dejan una firma en el espectro de las representaciones, detectable con SVD.</a:t>
+            </a:r>
+          </a:p>
+          <a:p>
+            <a:pPr>
+              <a:spcAft>
+                <a:spcPts val="600"/>
+              </a:spcAft>
+            </a:pPr>
+            <a:r>
+              <a:rPr sz="1500">
+                <a:solidFill>
+                  <a:srgbClr val="22282E"/>
+                </a:solidFill>
+              </a:rPr>
+              <a:t>•  Fine-pruning: podar neuronas poco activas con datos limpios y afinar; suele desactivar el backdoor.</a:t>
             </a:r>
           </a:p>
         </p:txBody>
@@ -4763,7 +5154,7 @@
                   <a:srgbClr val="0B3D2E"/>
                 </a:solidFill>
               </a:rPr>
-              <a:t>📝 Reto verificable</a:t>
+              <a:t>🧰 Herramientas y preparación</a:t>
             </a:r>
           </a:p>
         </p:txBody>
@@ -4801,22 +5192,37 @@
                   <a:srgbClr val="22282E"/>
                 </a:solidFill>
               </a:rPr>
-              <a:t>•  Entrega un modelo con backdoor funcional y su defensa: código que entrena el modelo envenenado, demuestra ASR ≥ 90% con el trigger y precisión limpia dentro de 1–2 puntos del modelo sano, y un segundo script que reduce el ASR por debajo del 10% mediante una defensa.</a:t>
-            </a:r>
-          </a:p>
-          <a:p>
-            <a:pPr>
-              <a:spcAft>
-                <a:spcPts val="600"/>
-              </a:spcAft>
-            </a:pPr>
-            <a:r>
-              <a:rPr sz="1500">
-                <a:solidFill>
-                  <a:srgbClr val="22282E"/>
-                </a:solidFill>
-              </a:rPr>
-              <a:t>•  Criterio de aceptación: un revisor ejecuta tu ataque y observa alto ASR con precisión limpia intacta; luego ejecuta tu defensa y observa el ASR desplomado. Se adjunta una tabla con las cuatro métricas (precisión limpia y ASR, antes y después).</a:t>
+              <a:t>•  ART incluye ataques de envenenamiento (PoisoningAttackBackdoor) y defensas (ActivationDefence, SpectralSignatureDefense).</a:t>
+            </a:r>
+          </a:p>
+          <a:p>
+            <a:pPr>
+              <a:spcAft>
+                <a:spcPts val="600"/>
+              </a:spcAft>
+            </a:pPr>
+            <a:r>
+              <a:rPr sz="1500">
+                <a:solidFill>
+                  <a:srgbClr val="22282E"/>
+                </a:solidFill>
+              </a:rPr>
+              <a:t>•  Un dataset propio (MNIST/CIFAR-10) y una CNN entrenable.</a:t>
+            </a:r>
+          </a:p>
+          <a:p>
+            <a:pPr>
+              <a:spcAft>
+                <a:spcPts val="600"/>
+              </a:spcAft>
+            </a:pPr>
+            <a:r>
+              <a:rPr sz="1500">
+                <a:solidFill>
+                  <a:srgbClr val="22282E"/>
+                </a:solidFill>
+              </a:rPr>
+              <a:t>•  Espacio para guardar dos modelos: limpio y envenenado.</a:t>
             </a:r>
           </a:p>
         </p:txBody>
